--- a/session-01/claude-code-deck1-he.pptx
+++ b/session-01/claude-code-deck1-he.pptx
@@ -3108,7 +3108,7 @@
           <a:p>
             <a:fld id="{C764DE79-268F-4C1A-8933-263129D2AF90}" type="datetimeFigureOut">
               <a:rPr lang="en-US" smtClean="0"/>
-              <a:t>5/7/26</a:t>
+              <a:t>5/9/26</a:t>
             </a:fld>
             <a:endParaRPr lang="en-US" dirty="0"/>
           </a:p>
@@ -3309,7 +3309,7 @@
           <a:p>
             <a:fld id="{C764DE79-268F-4C1A-8933-263129D2AF90}" type="datetimeFigureOut">
               <a:rPr lang="en-US" smtClean="0"/>
-              <a:t>5/7/26</a:t>
+              <a:t>5/9/26</a:t>
             </a:fld>
             <a:endParaRPr lang="en-US" dirty="0"/>
           </a:p>
@@ -3520,7 +3520,7 @@
           <a:p>
             <a:fld id="{C764DE79-268F-4C1A-8933-263129D2AF90}" type="datetimeFigureOut">
               <a:rPr lang="en-US" smtClean="0"/>
-              <a:t>5/7/26</a:t>
+              <a:t>5/9/26</a:t>
             </a:fld>
             <a:endParaRPr lang="en-US" dirty="0"/>
           </a:p>
@@ -3756,7 +3756,7 @@
           <a:p>
             <a:fld id="{C764DE79-268F-4C1A-8933-263129D2AF90}" type="datetimeFigureOut">
               <a:rPr lang="en-US" smtClean="0"/>
-              <a:t>5/7/26</a:t>
+              <a:t>5/9/26</a:t>
             </a:fld>
             <a:endParaRPr lang="en-US" dirty="0"/>
           </a:p>
@@ -4033,7 +4033,7 @@
           <a:p>
             <a:fld id="{C764DE79-268F-4C1A-8933-263129D2AF90}" type="datetimeFigureOut">
               <a:rPr lang="en-US" smtClean="0"/>
-              <a:t>5/7/26</a:t>
+              <a:t>5/9/26</a:t>
             </a:fld>
             <a:endParaRPr lang="en-US" dirty="0"/>
           </a:p>
@@ -4302,7 +4302,7 @@
           <a:p>
             <a:fld id="{C764DE79-268F-4C1A-8933-263129D2AF90}" type="datetimeFigureOut">
               <a:rPr lang="en-US" smtClean="0"/>
-              <a:t>5/7/26</a:t>
+              <a:t>5/9/26</a:t>
             </a:fld>
             <a:endParaRPr lang="en-US" dirty="0"/>
           </a:p>
@@ -4718,7 +4718,7 @@
           <a:p>
             <a:fld id="{C764DE79-268F-4C1A-8933-263129D2AF90}" type="datetimeFigureOut">
               <a:rPr lang="en-US" smtClean="0"/>
-              <a:t>5/7/26</a:t>
+              <a:t>5/9/26</a:t>
             </a:fld>
             <a:endParaRPr lang="en-US" dirty="0"/>
           </a:p>
@@ -4861,7 +4861,7 @@
           <a:p>
             <a:fld id="{C764DE79-268F-4C1A-8933-263129D2AF90}" type="datetimeFigureOut">
               <a:rPr lang="en-US" smtClean="0"/>
-              <a:t>5/7/26</a:t>
+              <a:t>5/9/26</a:t>
             </a:fld>
             <a:endParaRPr lang="en-US" dirty="0"/>
           </a:p>
@@ -4975,7 +4975,7 @@
           <a:p>
             <a:fld id="{C764DE79-268F-4C1A-8933-263129D2AF90}" type="datetimeFigureOut">
               <a:rPr lang="en-US" smtClean="0"/>
-              <a:t>5/7/26</a:t>
+              <a:t>5/9/26</a:t>
             </a:fld>
             <a:endParaRPr lang="en-US" dirty="0"/>
           </a:p>
@@ -5289,7 +5289,7 @@
           <a:p>
             <a:fld id="{C764DE79-268F-4C1A-8933-263129D2AF90}" type="datetimeFigureOut">
               <a:rPr lang="en-US" smtClean="0"/>
-              <a:t>5/7/26</a:t>
+              <a:t>5/9/26</a:t>
             </a:fld>
             <a:endParaRPr lang="en-US" dirty="0"/>
           </a:p>
@@ -5579,7 +5579,7 @@
           <a:p>
             <a:fld id="{C764DE79-268F-4C1A-8933-263129D2AF90}" type="datetimeFigureOut">
               <a:rPr lang="en-US" smtClean="0"/>
-              <a:t>5/7/26</a:t>
+              <a:t>5/9/26</a:t>
             </a:fld>
             <a:endParaRPr lang="en-US" dirty="0"/>
           </a:p>
@@ -5823,7 +5823,7 @@
           <a:p>
             <a:fld id="{C764DE79-268F-4C1A-8933-263129D2AF90}" type="datetimeFigureOut">
               <a:rPr lang="en-US" smtClean="0"/>
-              <a:t>5/7/26</a:t>
+              <a:t>5/9/26</a:t>
             </a:fld>
             <a:endParaRPr lang="en-US" dirty="0"/>
           </a:p>
@@ -17349,30 +17349,6 @@
           </a:p>
         </p:txBody>
       </p:sp>
-      <p:pic>
-        <p:nvPicPr>
-          <p:cNvPr id="8" name="Image 0" descr="./anthropic-naive.png"/>
-          <p:cNvPicPr>
-            <a:picLocks noChangeAspect="1"/>
-          </p:cNvPicPr>
-          <p:nvPr/>
-        </p:nvPicPr>
-        <p:blipFill>
-          <a:blip/>
-          <a:stretch>
-            <a:fillRect/>
-          </a:stretch>
-        </p:blipFill>
-        <p:spPr>
-          <a:xfrm>
-            <a:off x="6355080" y="3108960"/>
-            <a:ext cx="5212080" cy="2331720"/>
-          </a:xfrm>
-          <a:prstGeom prst="rect">
-            <a:avLst/>
-          </a:prstGeom>
-        </p:spPr>
-      </p:pic>
       <p:sp>
         <p:nvSpPr>
           <p:cNvPr id="9" name="Shape 6"/>
@@ -17483,30 +17459,6 @@
           </a:p>
         </p:txBody>
       </p:sp>
-      <p:pic>
-        <p:nvPicPr>
-          <p:cNvPr id="12" name="Image 1" descr="./anthropic-structured.png"/>
-          <p:cNvPicPr>
-            <a:picLocks noChangeAspect="1"/>
-          </p:cNvPicPr>
-          <p:nvPr/>
-        </p:nvPicPr>
-        <p:blipFill>
-          <a:blip/>
-          <a:stretch>
-            <a:fillRect/>
-          </a:stretch>
-        </p:blipFill>
-        <p:spPr>
-          <a:xfrm>
-            <a:off x="594360" y="3108960"/>
-            <a:ext cx="5212080" cy="2331720"/>
-          </a:xfrm>
-          <a:prstGeom prst="rect">
-            <a:avLst/>
-          </a:prstGeom>
-        </p:spPr>
-      </p:pic>
       <p:sp>
         <p:nvSpPr>
           <p:cNvPr id="13" name="Shape 9"/>
@@ -17617,6 +17569,66 @@
           </a:p>
         </p:txBody>
       </p:sp>
+      <p:pic>
+        <p:nvPicPr>
+          <p:cNvPr id="17" name="Picture 16" descr="A screenshot of a computer&#10;&#10;AI-generated content may be incorrect.">
+            <a:extLst>
+              <a:ext uri="{FF2B5EF4-FFF2-40B4-BE49-F238E27FC236}">
+                <a16:creationId xmlns:a16="http://schemas.microsoft.com/office/drawing/2014/main" id="{AD23FEB4-E1AA-FDC5-0A85-E938B59EA708}"/>
+              </a:ext>
+            </a:extLst>
+          </p:cNvPr>
+          <p:cNvPicPr>
+            <a:picLocks noChangeAspect="1"/>
+          </p:cNvPicPr>
+          <p:nvPr/>
+        </p:nvPicPr>
+        <p:blipFill>
+          <a:blip r:embed="rId3"/>
+          <a:stretch>
+            <a:fillRect/>
+          </a:stretch>
+        </p:blipFill>
+        <p:spPr>
+          <a:xfrm>
+            <a:off x="6727345" y="2927147"/>
+            <a:ext cx="4467550" cy="2466745"/>
+          </a:xfrm>
+          <a:prstGeom prst="rect">
+            <a:avLst/>
+          </a:prstGeom>
+        </p:spPr>
+      </p:pic>
+      <p:pic>
+        <p:nvPicPr>
+          <p:cNvPr id="19" name="Picture 18" descr="A screenshot of a computer&#10;&#10;AI-generated content may be incorrect.">
+            <a:extLst>
+              <a:ext uri="{FF2B5EF4-FFF2-40B4-BE49-F238E27FC236}">
+                <a16:creationId xmlns:a16="http://schemas.microsoft.com/office/drawing/2014/main" id="{8339AFDB-D3D4-27E1-D52D-A676663B987F}"/>
+              </a:ext>
+            </a:extLst>
+          </p:cNvPr>
+          <p:cNvPicPr>
+            <a:picLocks noChangeAspect="1"/>
+          </p:cNvPicPr>
+          <p:nvPr/>
+        </p:nvPicPr>
+        <p:blipFill>
+          <a:blip r:embed="rId4"/>
+          <a:stretch>
+            <a:fillRect/>
+          </a:stretch>
+        </p:blipFill>
+        <p:spPr>
+          <a:xfrm>
+            <a:off x="1095530" y="3018513"/>
+            <a:ext cx="4209740" cy="2375455"/>
+          </a:xfrm>
+          <a:prstGeom prst="rect">
+            <a:avLst/>
+          </a:prstGeom>
+        </p:spPr>
+      </p:pic>
     </p:spTree>
   </p:cSld>
   <p:clrMapOvr>
@@ -20571,108 +20583,114 @@
           </a:p>
         </p:txBody>
       </p:sp>
+      <p:sp>
+        <p:nvSpPr>
+          <p:cNvPr id="23" name="Text 20"/>
+          <p:cNvSpPr/>
+          <p:nvPr/>
+        </p:nvSpPr>
+        <p:spPr>
+          <a:xfrm>
+            <a:off x="6217920" y="6446520"/>
+            <a:ext cx="5486400" cy="274320"/>
+          </a:xfrm>
+          <a:prstGeom prst="rect">
+            <a:avLst/>
+          </a:prstGeom>
+          <a:noFill/>
+          <a:ln/>
+        </p:spPr>
+        <p:txBody>
+          <a:bodyPr wrap="square" lIns="0" tIns="0" rIns="0" bIns="0" rtlCol="0" anchor="ctr"/>
+          <a:lstStyle/>
+          <a:p>
+            <a:pPr marL="0" indent="0" algn="r" rtl="1">
+              <a:buNone/>
+            </a:pPr>
+            <a:r>
+              <a:rPr lang="en-US" sz="900" dirty="0">
+                <a:solidFill>
+                  <a:srgbClr val="5C564D"/>
+                </a:solidFill>
+                <a:latin typeface="Arial" pitchFamily="34" charset="0"/>
+                <a:ea typeface="Arial" pitchFamily="34" charset="-122"/>
+                <a:cs typeface="Arial" pitchFamily="34" charset="-120"/>
+              </a:rPr>
+              <a:t>Claude Code - יסודות</a:t>
+            </a:r>
+            <a:endParaRPr lang="en-US" sz="900" dirty="0"/>
+          </a:p>
+        </p:txBody>
+      </p:sp>
+      <p:sp>
+        <p:nvSpPr>
+          <p:cNvPr id="24" name="Text 21"/>
+          <p:cNvSpPr/>
+          <p:nvPr/>
+        </p:nvSpPr>
+        <p:spPr>
+          <a:xfrm>
+            <a:off x="457200" y="6446520"/>
+            <a:ext cx="548640" cy="274320"/>
+          </a:xfrm>
+          <a:prstGeom prst="rect">
+            <a:avLst/>
+          </a:prstGeom>
+          <a:noFill/>
+          <a:ln/>
+        </p:spPr>
+        <p:txBody>
+          <a:bodyPr wrap="square" lIns="0" tIns="0" rIns="0" bIns="0" rtlCol="0" anchor="ctr"/>
+          <a:lstStyle/>
+          <a:p>
+            <a:pPr marL="0" indent="0" algn="l">
+              <a:buNone/>
+            </a:pPr>
+            <a:r>
+              <a:rPr lang="en-US" sz="900" dirty="0">
+                <a:solidFill>
+                  <a:srgbClr val="5C564D"/>
+                </a:solidFill>
+                <a:latin typeface="Arial" pitchFamily="34" charset="0"/>
+                <a:ea typeface="Arial" pitchFamily="34" charset="-122"/>
+                <a:cs typeface="Arial" pitchFamily="34" charset="-120"/>
+              </a:rPr>
+              <a:t>21</a:t>
+            </a:r>
+            <a:endParaRPr lang="en-US" sz="900" dirty="0"/>
+          </a:p>
+        </p:txBody>
+      </p:sp>
       <p:pic>
         <p:nvPicPr>
-          <p:cNvPr id="22" name="Image 0" descr="./code-naive-response.png"/>
+          <p:cNvPr id="26" name="Picture 25" descr="A screenshot of a black screen&#10;&#10;AI-generated content may be incorrect.">
+            <a:extLst>
+              <a:ext uri="{FF2B5EF4-FFF2-40B4-BE49-F238E27FC236}">
+                <a16:creationId xmlns:a16="http://schemas.microsoft.com/office/drawing/2014/main" id="{6DDBEAF0-0CB1-3E9C-C012-6042D69AF16D}"/>
+              </a:ext>
+            </a:extLst>
+          </p:cNvPr>
           <p:cNvPicPr>
             <a:picLocks noChangeAspect="1"/>
           </p:cNvPicPr>
           <p:nvPr/>
         </p:nvPicPr>
         <p:blipFill>
-          <a:blip/>
+          <a:blip r:embed="rId3"/>
           <a:stretch>
             <a:fillRect/>
           </a:stretch>
         </p:blipFill>
         <p:spPr>
           <a:xfrm>
-            <a:off x="594360" y="2103120"/>
-            <a:ext cx="5212080" cy="4069080"/>
+            <a:off x="1632632" y="2097916"/>
+            <a:ext cx="3011139" cy="4067843"/>
           </a:xfrm>
           <a:prstGeom prst="rect">
             <a:avLst/>
           </a:prstGeom>
         </p:spPr>
       </p:pic>
-      <p:sp>
-        <p:nvSpPr>
-          <p:cNvPr id="23" name="Text 20"/>
-          <p:cNvSpPr/>
-          <p:nvPr/>
-        </p:nvSpPr>
-        <p:spPr>
-          <a:xfrm>
-            <a:off x="6217920" y="6446520"/>
-            <a:ext cx="5486400" cy="274320"/>
-          </a:xfrm>
-          <a:prstGeom prst="rect">
-            <a:avLst/>
-          </a:prstGeom>
-          <a:noFill/>
-          <a:ln/>
-        </p:spPr>
-        <p:txBody>
-          <a:bodyPr wrap="square" lIns="0" tIns="0" rIns="0" bIns="0" rtlCol="0" anchor="ctr"/>
-          <a:lstStyle/>
-          <a:p>
-            <a:pPr marL="0" indent="0" algn="r" rtl="1">
-              <a:buNone/>
-            </a:pPr>
-            <a:r>
-              <a:rPr lang="en-US" sz="900" dirty="0">
-                <a:solidFill>
-                  <a:srgbClr val="5C564D"/>
-                </a:solidFill>
-                <a:latin typeface="Arial" pitchFamily="34" charset="0"/>
-                <a:ea typeface="Arial" pitchFamily="34" charset="-122"/>
-                <a:cs typeface="Arial" pitchFamily="34" charset="-120"/>
-              </a:rPr>
-              <a:t>Claude Code - יסודות</a:t>
-            </a:r>
-            <a:endParaRPr lang="en-US" sz="900" dirty="0"/>
-          </a:p>
-        </p:txBody>
-      </p:sp>
-      <p:sp>
-        <p:nvSpPr>
-          <p:cNvPr id="24" name="Text 21"/>
-          <p:cNvSpPr/>
-          <p:nvPr/>
-        </p:nvSpPr>
-        <p:spPr>
-          <a:xfrm>
-            <a:off x="457200" y="6446520"/>
-            <a:ext cx="548640" cy="274320"/>
-          </a:xfrm>
-          <a:prstGeom prst="rect">
-            <a:avLst/>
-          </a:prstGeom>
-          <a:noFill/>
-          <a:ln/>
-        </p:spPr>
-        <p:txBody>
-          <a:bodyPr wrap="square" lIns="0" tIns="0" rIns="0" bIns="0" rtlCol="0" anchor="ctr"/>
-          <a:lstStyle/>
-          <a:p>
-            <a:pPr marL="0" indent="0" algn="l">
-              <a:buNone/>
-            </a:pPr>
-            <a:r>
-              <a:rPr lang="en-US" sz="900" dirty="0">
-                <a:solidFill>
-                  <a:srgbClr val="5C564D"/>
-                </a:solidFill>
-                <a:latin typeface="Arial" pitchFamily="34" charset="0"/>
-                <a:ea typeface="Arial" pitchFamily="34" charset="-122"/>
-                <a:cs typeface="Arial" pitchFamily="34" charset="-120"/>
-              </a:rPr>
-              <a:t>21</a:t>
-            </a:r>
-            <a:endParaRPr lang="en-US" sz="900" dirty="0"/>
-          </a:p>
-        </p:txBody>
-      </p:sp>
     </p:spTree>
   </p:cSld>
   <p:clrMapOvr>
@@ -21472,108 +21490,114 @@
           </a:p>
         </p:txBody>
       </p:sp>
+      <p:sp>
+        <p:nvSpPr>
+          <p:cNvPr id="23" name="Text 20"/>
+          <p:cNvSpPr/>
+          <p:nvPr/>
+        </p:nvSpPr>
+        <p:spPr>
+          <a:xfrm>
+            <a:off x="6217920" y="6446520"/>
+            <a:ext cx="5486400" cy="274320"/>
+          </a:xfrm>
+          <a:prstGeom prst="rect">
+            <a:avLst/>
+          </a:prstGeom>
+          <a:noFill/>
+          <a:ln/>
+        </p:spPr>
+        <p:txBody>
+          <a:bodyPr wrap="square" lIns="0" tIns="0" rIns="0" bIns="0" rtlCol="0" anchor="ctr"/>
+          <a:lstStyle/>
+          <a:p>
+            <a:pPr marL="0" indent="0" algn="r" rtl="1">
+              <a:buNone/>
+            </a:pPr>
+            <a:r>
+              <a:rPr lang="en-US" sz="900" dirty="0">
+                <a:solidFill>
+                  <a:srgbClr val="9B9588"/>
+                </a:solidFill>
+                <a:latin typeface="Arial" pitchFamily="34" charset="0"/>
+                <a:ea typeface="Arial" pitchFamily="34" charset="-122"/>
+                <a:cs typeface="Arial" pitchFamily="34" charset="-120"/>
+              </a:rPr>
+              <a:t>Claude Code - יסודות</a:t>
+            </a:r>
+            <a:endParaRPr lang="en-US" sz="900" dirty="0"/>
+          </a:p>
+        </p:txBody>
+      </p:sp>
+      <p:sp>
+        <p:nvSpPr>
+          <p:cNvPr id="24" name="Text 21"/>
+          <p:cNvSpPr/>
+          <p:nvPr/>
+        </p:nvSpPr>
+        <p:spPr>
+          <a:xfrm>
+            <a:off x="457200" y="6446520"/>
+            <a:ext cx="548640" cy="274320"/>
+          </a:xfrm>
+          <a:prstGeom prst="rect">
+            <a:avLst/>
+          </a:prstGeom>
+          <a:noFill/>
+          <a:ln/>
+        </p:spPr>
+        <p:txBody>
+          <a:bodyPr wrap="square" lIns="0" tIns="0" rIns="0" bIns="0" rtlCol="0" anchor="ctr"/>
+          <a:lstStyle/>
+          <a:p>
+            <a:pPr marL="0" indent="0" algn="l">
+              <a:buNone/>
+            </a:pPr>
+            <a:r>
+              <a:rPr lang="en-US" sz="900" dirty="0">
+                <a:solidFill>
+                  <a:srgbClr val="9B9588"/>
+                </a:solidFill>
+                <a:latin typeface="Arial" pitchFamily="34" charset="0"/>
+                <a:ea typeface="Arial" pitchFamily="34" charset="-122"/>
+                <a:cs typeface="Arial" pitchFamily="34" charset="-120"/>
+              </a:rPr>
+              <a:t>22</a:t>
+            </a:r>
+            <a:endParaRPr lang="en-US" sz="900" dirty="0"/>
+          </a:p>
+        </p:txBody>
+      </p:sp>
       <p:pic>
         <p:nvPicPr>
-          <p:cNvPr id="22" name="Image 0" descr="./code-structured-response.png"/>
+          <p:cNvPr id="26" name="Picture 25" descr="A screenshot of a black screen&#10;&#10;AI-generated content may be incorrect.">
+            <a:extLst>
+              <a:ext uri="{FF2B5EF4-FFF2-40B4-BE49-F238E27FC236}">
+                <a16:creationId xmlns:a16="http://schemas.microsoft.com/office/drawing/2014/main" id="{BE0271A0-ABD1-3B8A-EDD3-5EBBBA7DE1D1}"/>
+              </a:ext>
+            </a:extLst>
+          </p:cNvPr>
           <p:cNvPicPr>
             <a:picLocks noChangeAspect="1"/>
           </p:cNvPicPr>
           <p:nvPr/>
         </p:nvPicPr>
         <p:blipFill>
-          <a:blip/>
+          <a:blip r:embed="rId3"/>
           <a:stretch>
             <a:fillRect/>
           </a:stretch>
         </p:blipFill>
         <p:spPr>
           <a:xfrm>
-            <a:off x="594360" y="2103120"/>
-            <a:ext cx="5212080" cy="4069080"/>
+            <a:off x="883734" y="2034159"/>
+            <a:ext cx="3093843" cy="4179570"/>
           </a:xfrm>
           <a:prstGeom prst="rect">
             <a:avLst/>
           </a:prstGeom>
         </p:spPr>
       </p:pic>
-      <p:sp>
-        <p:nvSpPr>
-          <p:cNvPr id="23" name="Text 20"/>
-          <p:cNvSpPr/>
-          <p:nvPr/>
-        </p:nvSpPr>
-        <p:spPr>
-          <a:xfrm>
-            <a:off x="6217920" y="6446520"/>
-            <a:ext cx="5486400" cy="274320"/>
-          </a:xfrm>
-          <a:prstGeom prst="rect">
-            <a:avLst/>
-          </a:prstGeom>
-          <a:noFill/>
-          <a:ln/>
-        </p:spPr>
-        <p:txBody>
-          <a:bodyPr wrap="square" lIns="0" tIns="0" rIns="0" bIns="0" rtlCol="0" anchor="ctr"/>
-          <a:lstStyle/>
-          <a:p>
-            <a:pPr marL="0" indent="0" algn="r" rtl="1">
-              <a:buNone/>
-            </a:pPr>
-            <a:r>
-              <a:rPr lang="en-US" sz="900" dirty="0">
-                <a:solidFill>
-                  <a:srgbClr val="9B9588"/>
-                </a:solidFill>
-                <a:latin typeface="Arial" pitchFamily="34" charset="0"/>
-                <a:ea typeface="Arial" pitchFamily="34" charset="-122"/>
-                <a:cs typeface="Arial" pitchFamily="34" charset="-120"/>
-              </a:rPr>
-              <a:t>Claude Code - יסודות</a:t>
-            </a:r>
-            <a:endParaRPr lang="en-US" sz="900" dirty="0"/>
-          </a:p>
-        </p:txBody>
-      </p:sp>
-      <p:sp>
-        <p:nvSpPr>
-          <p:cNvPr id="24" name="Text 21"/>
-          <p:cNvSpPr/>
-          <p:nvPr/>
-        </p:nvSpPr>
-        <p:spPr>
-          <a:xfrm>
-            <a:off x="457200" y="6446520"/>
-            <a:ext cx="548640" cy="274320"/>
-          </a:xfrm>
-          <a:prstGeom prst="rect">
-            <a:avLst/>
-          </a:prstGeom>
-          <a:noFill/>
-          <a:ln/>
-        </p:spPr>
-        <p:txBody>
-          <a:bodyPr wrap="square" lIns="0" tIns="0" rIns="0" bIns="0" rtlCol="0" anchor="ctr"/>
-          <a:lstStyle/>
-          <a:p>
-            <a:pPr marL="0" indent="0" algn="l">
-              <a:buNone/>
-            </a:pPr>
-            <a:r>
-              <a:rPr lang="en-US" sz="900" dirty="0">
-                <a:solidFill>
-                  <a:srgbClr val="9B9588"/>
-                </a:solidFill>
-                <a:latin typeface="Arial" pitchFamily="34" charset="0"/>
-                <a:ea typeface="Arial" pitchFamily="34" charset="-122"/>
-                <a:cs typeface="Arial" pitchFamily="34" charset="-120"/>
-              </a:rPr>
-              <a:t>22</a:t>
-            </a:r>
-            <a:endParaRPr lang="en-US" sz="900" dirty="0"/>
-          </a:p>
-        </p:txBody>
-      </p:sp>
     </p:spTree>
   </p:cSld>
   <p:clrMapOvr>

--- a/session-01/claude-code-deck1-he.pptx
+++ b/session-01/claude-code-deck1-he.pptx
@@ -28,13 +28,6 @@
     <p:sldId id="295" r:id="rId19"/>
     <p:sldId id="264" r:id="rId20"/>
     <p:sldId id="265" r:id="rId21"/>
-    <p:sldId id="266" r:id="rId22"/>
-    <p:sldId id="267" r:id="rId23"/>
-    <p:sldId id="268" r:id="rId24"/>
-    <p:sldId id="284" r:id="rId25"/>
-    <p:sldId id="285" r:id="rId26"/>
-    <p:sldId id="271" r:id="rId27"/>
-    <p:sldId id="272" r:id="rId28"/>
     <p:sldId id="273" r:id="rId29"/>
     <p:sldId id="275" r:id="rId30"/>
     <p:sldId id="274" r:id="rId31"/>
@@ -42,6 +35,13 @@
     <p:sldId id="277" r:id="rId33"/>
     <p:sldId id="278" r:id="rId34"/>
     <p:sldId id="279" r:id="rId35"/>
+    <p:sldId id="272" r:id="rId28"/>
+    <p:sldId id="266" r:id="rId22"/>
+    <p:sldId id="267" r:id="rId23"/>
+    <p:sldId id="268" r:id="rId24"/>
+    <p:sldId id="284" r:id="rId25"/>
+    <p:sldId id="285" r:id="rId26"/>
+    <p:sldId id="271" r:id="rId27"/>
     <p:sldId id="280" r:id="rId36"/>
     <p:sldId id="281" r:id="rId37"/>
     <p:sldId id="282" r:id="rId38"/>
@@ -19979,7 +19979,7 @@
                 <a:ea typeface="Arial" pitchFamily="34" charset="-122"/>
                 <a:cs typeface="Arial" pitchFamily="34" charset="-120"/>
               </a:rPr>
-              <a:t>חלק 02</a:t>
+              <a:t>חלק 03</a:t>
             </a:r>
             <a:endParaRPr lang="en-US" sz="1400" dirty="0"/>
           </a:p>
@@ -20129,7 +20129,7 @@
                 <a:ea typeface="Arial" pitchFamily="34" charset="-122"/>
                 <a:cs typeface="Arial" pitchFamily="34" charset="-120"/>
               </a:rPr>
-              <a:t>חלק 02  ·  מה זה</a:t>
+              <a:t>חלק 03  ·  מה זה</a:t>
             </a:r>
             <a:endParaRPr lang="en-US" sz="1100" dirty="0"/>
           </a:p>
@@ -20971,7 +20971,7 @@
                 <a:ea typeface="Arial" pitchFamily="34" charset="-122"/>
                 <a:cs typeface="Arial" pitchFamily="34" charset="-120"/>
               </a:rPr>
-              <a:t>חלק 02  ·  SKILL לדוגמה  ·  UI</a:t>
+              <a:t>חלק 03  ·  SKILL לדוגמה  ·  UI</a:t>
             </a:r>
             <a:endParaRPr lang="en-US" sz="1100" dirty="0"/>
           </a:p>
@@ -21894,7 +21894,7 @@
                 <a:ea typeface="Arial" pitchFamily="34" charset="-122"/>
                 <a:cs typeface="Arial" pitchFamily="34" charset="-120"/>
               </a:rPr>
-              <a:t>חלק 02  ·  SKILL לדוגמה  ·  CODE REVIEW</a:t>
+              <a:t>חלק 03  ·  SKILL לדוגמה  ·  CODE REVIEW</a:t>
             </a:r>
             <a:endParaRPr lang="en-US" sz="1100" dirty="0"/>
           </a:p>
@@ -22820,7 +22820,7 @@
                 <a:ea typeface="Arial" pitchFamily="34" charset="-122"/>
                 <a:cs typeface="Arial" pitchFamily="34" charset="-120"/>
               </a:rPr>
-              <a:t>חלק 02  ·  SKILL </a:t>
+              <a:t>חלק 03  ·  SKILL </a:t>
             </a:r>
             <a:r>
               <a:rPr lang="en-US" sz="1100" b="1" kern="0" spc="400" dirty="0" err="1">
@@ -23833,7 +23833,7 @@
                 <a:ea typeface="Arial" pitchFamily="34" charset="-122"/>
                 <a:cs typeface="Arial" pitchFamily="34" charset="-120"/>
               </a:rPr>
-              <a:t>חלק 02  ·  SKILL משלך</a:t>
+              <a:t>חלק 03  ·  SKILL משלך</a:t>
             </a:r>
             <a:endParaRPr lang="en-US" sz="1100" dirty="0"/>
           </a:p>
@@ -25138,7 +25138,7 @@
                 <a:ea typeface="Arial" pitchFamily="34" charset="-122"/>
                 <a:cs typeface="Arial" pitchFamily="34" charset="-120"/>
               </a:rPr>
-              <a:t>חלק 03</a:t>
+              <a:t>חלק 02</a:t>
             </a:r>
             <a:endParaRPr lang="en-US" sz="1400" dirty="0"/>
           </a:p>
@@ -25288,7 +25288,7 @@
                 <a:ea typeface="Arial" pitchFamily="34" charset="-122"/>
                 <a:cs typeface="Arial" pitchFamily="34" charset="-120"/>
               </a:rPr>
-              <a:t>חלק 03  ·  הדוגמה הקנונית</a:t>
+              <a:t>חלק 02  ·  הדוגמה הקנונית</a:t>
             </a:r>
             <a:endParaRPr lang="en-US" sz="1100" dirty="0"/>
           </a:p>
@@ -26510,7 +26510,7 @@
                 <a:ea typeface="Arial" pitchFamily="34" charset="-122"/>
                 <a:cs typeface="Arial" pitchFamily="34" charset="-120"/>
               </a:rPr>
-              <a:t>חלק 03  ·  המסגרת</a:t>
+              <a:t>חלק 02  ·  המסגרת</a:t>
             </a:r>
             <a:endParaRPr lang="en-US" sz="1100" dirty="0"/>
           </a:p>
@@ -28665,7 +28665,7 @@
                 <a:ea typeface="Arial" pitchFamily="34" charset="-122"/>
                 <a:cs typeface="Arial" pitchFamily="34" charset="-120"/>
               </a:rPr>
-              <a:t>חלק 03  ·  בקוד  ·  פרומפט נאיבי</a:t>
+              <a:t>חלק 02  ·  בקוד  ·  פרומפט נאיבי</a:t>
             </a:r>
             <a:endParaRPr lang="en-US" sz="1100" dirty="0"/>
           </a:p>
@@ -29572,7 +29572,7 @@
                 <a:ea typeface="Arial" pitchFamily="34" charset="-122"/>
                 <a:cs typeface="Arial" pitchFamily="34" charset="-120"/>
               </a:rPr>
-              <a:t>חלק 03  ·  בקוד  ·  פרומפט מובנה</a:t>
+              <a:t>חלק 02  ·  בקוד  ·  פרומפט מובנה</a:t>
             </a:r>
             <a:endParaRPr lang="en-US" sz="1100" dirty="0"/>
           </a:p>
@@ -30479,7 +30479,7 @@
                 <a:ea typeface="Arial" pitchFamily="34" charset="-122"/>
                 <a:cs typeface="Arial" pitchFamily="34" charset="-120"/>
               </a:rPr>
-              <a:t>חלק 03  ·  המסקנה</a:t>
+              <a:t>חלק 02  ·  המסקנה</a:t>
             </a:r>
             <a:endParaRPr lang="en-US" sz="1100" dirty="0"/>
           </a:p>
@@ -31617,7 +31617,7 @@
                 <a:ea typeface="Arial" pitchFamily="34" charset="-122"/>
                 <a:cs typeface="Arial" pitchFamily="34" charset="-120"/>
               </a:rPr>
-              <a:t>חלק 03  ·  תרגול</a:t>
+              <a:t>חלק 02  ·  תרגול</a:t>
             </a:r>
             <a:endParaRPr lang="en-US" sz="1100" dirty="0"/>
           </a:p>
@@ -35978,7 +35978,7 @@
                 <a:ea typeface="Arial" pitchFamily="34" charset="-122"/>
                 <a:cs typeface="Arial" pitchFamily="34" charset="-120"/>
               </a:rPr>
-              <a:t>Skills</a:t>
+              <a:t>הנחיה</a:t>
             </a:r>
             <a:endParaRPr lang="en-US" sz="2400" dirty="0"/>
           </a:p>
@@ -36049,7 +36049,7 @@
                 <a:ea typeface="Arial" pitchFamily="34" charset="-122"/>
                 <a:cs typeface="Arial" pitchFamily="34" charset="-120"/>
               </a:rPr>
-              <a:t>30 דק׳</a:t>
+              <a:t>50 דק׳</a:t>
             </a:r>
             <a:endParaRPr lang="en-US" sz="1100" dirty="0"/>
           </a:p>
@@ -36088,7 +36088,7 @@
                 <a:ea typeface="Arial" pitchFamily="34" charset="-122"/>
                 <a:cs typeface="Arial" pitchFamily="34" charset="-120"/>
               </a:rPr>
-              <a:t>מודולי מומחיות לשימוש חוזר. UI, code review, security audit.</a:t>
+              <a:t>מסגרת בת 10 רכיבים. דוגמה ויזואלית מ-Anthropic. תרגול עצמאי בקוד.</a:t>
             </a:r>
             <a:endParaRPr lang="en-US" sz="1300" dirty="0"/>
           </a:p>
@@ -36166,7 +36166,7 @@
                 <a:ea typeface="Arial" pitchFamily="34" charset="-122"/>
                 <a:cs typeface="Arial" pitchFamily="34" charset="-120"/>
               </a:rPr>
-              <a:t>הנחיה</a:t>
+              <a:t>Skills</a:t>
             </a:r>
             <a:endParaRPr lang="en-US" sz="2400" dirty="0"/>
           </a:p>
@@ -36237,7 +36237,7 @@
                 <a:ea typeface="Arial" pitchFamily="34" charset="-122"/>
                 <a:cs typeface="Arial" pitchFamily="34" charset="-120"/>
               </a:rPr>
-              <a:t>50 דק׳</a:t>
+              <a:t>30 דק׳</a:t>
             </a:r>
             <a:endParaRPr lang="en-US" sz="1100" dirty="0"/>
           </a:p>
@@ -36276,7 +36276,7 @@
                 <a:ea typeface="Arial" pitchFamily="34" charset="-122"/>
                 <a:cs typeface="Arial" pitchFamily="34" charset="-120"/>
               </a:rPr>
-              <a:t>מסגרת בת 10 רכיבים. דוגמה ויזואלית מ-Anthropic. תרגול עצמאי בקוד.</a:t>
+              <a:t>מודולי מומחיות לשימוש חוזר. UI, code review, security audit.</a:t>
             </a:r>
             <a:endParaRPr lang="en-US" sz="1300" dirty="0"/>
           </a:p>
